--- a/course/高校实验室安全/课件/005_安全检查与隐患整改.pptx
+++ b/course/高校实验室安全/课件/005_安全检查与隐患整改.pptx
@@ -531,12 +531,6 @@
               <a:t>除了人员行为和环境，设备设施本身也要定期检查和维护：通风柜、生物安全柜、洗眼器和喷淋、灭火器、电气线路、压力容器等，按规定周期检查维护并做好记录，发现问题及时整改。各类设备设施的具体检查要求在对应专题课中讲解（如电气检查见第 104 课，消防器材检查见第 33 课）。</a:t>
             </a:r>
           </a:p>
-          <a:p/>
-          <a:p>
-            <a:r>
-              <a:t>来源：合并了 3 个原知识点，最佳讲解取自 Chemical Spillage &amp; Response 07（详见 来源.tsv）</a:t>
-            </a:r>
-          </a:p>
         </p:txBody>
       </p:sp>
       <p:sp>
@@ -612,12 +606,6 @@
               <a:t>漏掉“找根因”和“验证”两步，问题就会反复出现；小问题如果不从根上改，会越积越多，最终酿成事故或受到严重处理。收到学校或上级的检查意见后，要按时回复，逐项写明整改措施和完成日期；拖延、敷衍只会让后果更严重。</a:t>
             </a:r>
           </a:p>
-          <a:p/>
-          <a:p>
-            <a:r>
-              <a:t>来源：合并了 8 个原知识点，最佳讲解取自 Acids, Bases &amp; Solvents Safety 02（详见 来源.tsv）</a:t>
-            </a:r>
-          </a:p>
         </p:txBody>
       </p:sp>
       <p:sp>
@@ -693,12 +681,6 @@
               <a:t>要定期把检查发现的问题汇总起来，看看有没有重复出现的趋势。例如多个实验室都缺培训记录，说明问题不在个人，而在培训和记录系统本身，应从制度和流程上改进。这样，检查就成为持续改进的帮手，而不是负担。</a:t>
             </a:r>
           </a:p>
-          <a:p/>
-          <a:p>
-            <a:r>
-              <a:t>来源：合并了 1 个原知识点，最佳讲解取自 Acids, Bases &amp; Solvents Safety 02（详见 来源.tsv）</a:t>
-            </a:r>
-          </a:p>
         </p:txBody>
       </p:sp>
       <p:sp>
@@ -774,12 +756,6 @@
               <a:t>危险化学品领用登记、仪器使用记录、安全检查记录等台账，与实验记录本一样，要如实、及时填写，不事后补记。</a:t>
             </a:r>
           </a:p>
-          <a:p/>
-          <a:p>
-            <a:r>
-              <a:t>来源：合并了 2 个原知识点，最佳讲解取自 Electrical Safety Series 08（详见 来源.tsv）</a:t>
-            </a:r>
-          </a:p>
         </p:txBody>
       </p:sp>
       <p:sp>
@@ -855,12 +831,6 @@
               <a:t>不同记录的保存期限各不相同（培训记录、检查记录、化学品台账、废弃物转移联单、个人剂量档案等），具体期限按国家规定和本校档案管理规定执行。乱塞的文件柜无法满足这些要求，建议建立分类清晰、备份可靠的电子档案，做到随时调出、查找方便。</a:t>
             </a:r>
           </a:p>
-          <a:p/>
-          <a:p>
-            <a:r>
-              <a:t>来源：合并了 3 个原知识点，最佳讲解取自 Acids, Bases &amp; Solvents Safety 02（详见 来源.tsv）</a:t>
-            </a:r>
-          </a:p>
         </p:txBody>
       </p:sp>
       <p:sp>
@@ -936,12 +906,6 @@
               <a:t>一个安全管理成熟的实验室，日常就是这样的：安全制度和规程现行有效、审批签字齐全、随时能调出；培训记录能证明人员确实会做，而不只是签到；设备状态有效、标识清楚；连险情也进入整改闭环。做到这些，即使是不打招呼的突击检查，实验室也能一切照常。检查还可以成为大家一起学习的机会。</a:t>
             </a:r>
           </a:p>
-          <a:p/>
-          <a:p>
-            <a:r>
-              <a:t>来源：合并了 4 个原知识点，最佳讲解取自 Acids, Bases &amp; Solvents Safety 02（详见 来源.tsv）</a:t>
-            </a:r>
-          </a:p>
         </p:txBody>
       </p:sp>
       <p:sp>
@@ -1017,12 +981,6 @@
               <a:t>检查人员提问时如实回答；不知道的就说不知道，并当场查阅手册或请教负责人，而不是随口编造。平时什么样，检查时就什么样。</a:t>
             </a:r>
           </a:p>
-          <a:p/>
-          <a:p>
-            <a:r>
-              <a:t>来源：合并了 2 个原知识点，最佳讲解取自 Microbiology Biosafety 50（详见 来源.tsv）</a:t>
-            </a:r>
-          </a:p>
         </p:txBody>
       </p:sp>
       <p:sp>
@@ -1318,12 +1276,6 @@
               <a:t>检查频次以本校规定为准。各级检查发现的问题都应登记，并进入隐患整改闭环。</a:t>
             </a:r>
           </a:p>
-          <a:p/>
-          <a:p>
-            <a:r>
-              <a:t>来源：合并了 3 个原知识点，最佳讲解取自 Electrical Safety Series 12（详见 来源.tsv）</a:t>
-            </a:r>
-          </a:p>
         </p:txBody>
       </p:sp>
       <p:sp>
@@ -1399,12 +1351,6 @@
               <a:t>实验室的状况一直在变化：新试剂到货、实验装置搭建、人员进出。因此安全员和负责人一天中要多次巡视。自查中发现的小问题，能当场处理的就当场处理（如收好线缆、盖好试剂瓶）；处理不了的及时报告。</a:t>
             </a:r>
           </a:p>
-          <a:p/>
-          <a:p>
-            <a:r>
-              <a:t>来源：合并了 4 个原知识点，最佳讲解取自 Microbiology Biosafety 50（详见 来源.tsv）</a:t>
-            </a:r>
-          </a:p>
         </p:txBody>
       </p:sp>
       <p:sp>
@@ -1480,12 +1426,6 @@
               <a:t>模拟检查查出的问题，要像正式检查一样登记和整改。它能暴露记录缺失、人员回答不上来、隐患长期存在等问题，帮助在正式检查和事故之前把漏洞补上。</a:t>
             </a:r>
           </a:p>
-          <a:p/>
-          <a:p>
-            <a:r>
-              <a:t>来源：合并了 2 个原知识点，最佳讲解取自 Acids, Bases &amp; Solvents Safety 02（详见 来源.tsv）</a:t>
-            </a:r>
-          </a:p>
         </p:txBody>
       </p:sp>
       <p:sp>
@@ -1561,12 +1501,6 @@
               <a:t>必须持续运行的设备应在显著位置注明值守人和联系方式，并按本校规定报备，安排假期巡查。</a:t>
             </a:r>
           </a:p>
-          <a:p/>
-          <a:p>
-            <a:r>
-              <a:t>来源：合并了 1 个原知识点，最佳讲解取自 Lab Safety Training - Essential Protocols 08（详见 来源.tsv）</a:t>
-            </a:r>
-          </a:p>
         </p:txBody>
       </p:sp>
       <p:sp>
@@ -1642,12 +1576,6 @@
               <a:t>隐患常常藏在不显眼的地方：柜子后面、实验台下、通风柜内角、天花板上方、长期不用的储物间。检查时要仔细，必要时借助手电。清单只是起点，平时多看多想，才能发现清单没写到的问题。</a:t>
             </a:r>
           </a:p>
-          <a:p/>
-          <a:p>
-            <a:r>
-              <a:t>来源：合并了 5 个原知识点，最佳讲解取自 Chemical Spillage &amp; Response 07（详见 来源.tsv）</a:t>
-            </a:r>
-          </a:p>
         </p:txBody>
       </p:sp>
       <p:sp>
@@ -1723,12 +1651,6 @@
               <a:t>安全审核的目的，是找出与法规、标准和制度不符合或没有执行的地方。发现的问题要记录在案，并限期整改。</a:t>
             </a:r>
           </a:p>
-          <a:p/>
-          <a:p>
-            <a:r>
-              <a:t>来源：合并了 2 个原知识点，最佳讲解取自 Acids, Bases &amp; Solvents Safety 11（详见 来源.tsv）</a:t>
-            </a:r>
-          </a:p>
         </p:txBody>
       </p:sp>
       <p:sp>
@@ -1804,12 +1726,6 @@
               <a:t>险情（未遂事件）同样要报告：虽然没有造成伤害，但说明防线存在漏洞。报告后要登记、整改、复查，形成闭环；在组会等场合分享出来，其他人就不会再犯同样的错误。报告隐患和险情是每个人的权利和义务，学校鼓励并保护报告人。</a:t>
             </a:r>
           </a:p>
-          <a:p/>
-          <a:p>
-            <a:r>
-              <a:t>来源：合并了 5 个原知识点，最佳讲解取自 Chemical Spillage &amp; Response 03（详见 来源.tsv）</a:t>
-            </a:r>
-          </a:p>
         </p:txBody>
       </p:sp>
       <p:sp>
@@ -1883,12 +1799,6 @@
           <a:p>
             <a:r>
               <a:t>重大隐患不能“记下来等例会再说”：要立即报告实验室负责人和学院，必要时报学校；同时立即停止相关实验、停用相关设备或场所，采取临时防护措施。整改完成后，经复查合格才能恢复使用，并记录跟踪。</a:t>
-            </a:r>
-          </a:p>
-          <a:p/>
-          <a:p>
-            <a:r>
-              <a:t>来源：合并了 2 个原知识点，最佳讲解取自 Acids, Bases &amp; Solvents Safety 02（详见 来源.tsv）</a:t>
             </a:r>
           </a:p>
         </p:txBody>
